--- a/skills/ppt-creator/templates/executive_deck.pptx
+++ b/skills/ppt-creator/templates/executive_deck.pptx
@@ -3097,14 +3097,100 @@
       <p:grpSpPr/>
       <p:sp>
         <p:nvSpPr>
-          <p:cNvPr id="2" name="TextBox 1"/>
+          <p:cNvPr id="2" name="Rectangle 1"/>
+          <p:cNvSpPr/>
+          <p:nvPr/>
+        </p:nvSpPr>
+        <p:spPr>
+          <a:xfrm>
+            <a:off x="0" y="0"/>
+            <a:ext cx="457200" cy="6858000"/>
+          </a:xfrm>
+          <a:prstGeom prst="rect">
+            <a:avLst/>
+          </a:prstGeom>
+          <a:solidFill>
+            <a:srgbClr val="002B5C"/>
+          </a:solidFill>
+          <a:ln>
+            <a:noFill/>
+          </a:ln>
+        </p:spPr>
+        <p:style>
+          <a:lnRef idx="1">
+            <a:schemeClr val="accent1"/>
+          </a:lnRef>
+          <a:fillRef idx="3">
+            <a:schemeClr val="accent1"/>
+          </a:fillRef>
+          <a:effectRef idx="2">
+            <a:schemeClr val="accent1"/>
+          </a:effectRef>
+          <a:fontRef idx="minor">
+            <a:schemeClr val="lt1"/>
+          </a:fontRef>
+        </p:style>
+        <p:txBody>
+          <a:bodyPr rtlCol="0" anchor="ctr"/>
+          <a:lstStyle/>
+          <a:p>
+            <a:pPr algn="ctr"/>
+          </a:p>
+        </p:txBody>
+      </p:sp>
+      <p:sp>
+        <p:nvSpPr>
+          <p:cNvPr id="3" name="Rectangle 2"/>
+          <p:cNvSpPr/>
+          <p:nvPr/>
+        </p:nvSpPr>
+        <p:spPr>
+          <a:xfrm>
+            <a:off x="457200" y="3200400"/>
+            <a:ext cx="4572000" cy="45720"/>
+          </a:xfrm>
+          <a:prstGeom prst="rect">
+            <a:avLst/>
+          </a:prstGeom>
+          <a:solidFill>
+            <a:srgbClr val="007EE5"/>
+          </a:solidFill>
+          <a:ln>
+            <a:noFill/>
+          </a:ln>
+        </p:spPr>
+        <p:style>
+          <a:lnRef idx="1">
+            <a:schemeClr val="accent1"/>
+          </a:lnRef>
+          <a:fillRef idx="3">
+            <a:schemeClr val="accent1"/>
+          </a:fillRef>
+          <a:effectRef idx="2">
+            <a:schemeClr val="accent1"/>
+          </a:effectRef>
+          <a:fontRef idx="minor">
+            <a:schemeClr val="lt1"/>
+          </a:fontRef>
+        </p:style>
+        <p:txBody>
+          <a:bodyPr rtlCol="0" anchor="ctr"/>
+          <a:lstStyle/>
+          <a:p>
+            <a:pPr algn="ctr"/>
+          </a:p>
+        </p:txBody>
+      </p:sp>
+      <p:sp>
+        <p:nvSpPr>
+          <p:cNvPr id="4" name="TextBox 3"/>
           <p:cNvSpPr txBox="1"/>
           <p:nvPr/>
         </p:nvSpPr>
         <p:spPr>
           <a:xfrm>
-            <a:off x="457200" y="365760"/>
-            <a:ext cx="11247120" cy="822960"/>
+            <a:off x="1097280" y="1828800"/>
+            <a:ext cx="8229600" cy="1371600"/>
           </a:xfrm>
           <a:prstGeom prst="rect">
             <a:avLst/>
@@ -3112,18 +3198,65 @@
           <a:noFill/>
         </p:spPr>
         <p:txBody>
-          <a:bodyPr wrap="none">
-            <a:spAutoFit/>
-          </a:bodyPr>
-          <a:lstStyle/>
-          <a:p>
-            <a:r>
-              <a:rPr sz="2400" b="1">
+          <a:bodyPr wrap="square"/>
+          <a:lstStyle/>
+          <a:p>
+            <a:pPr algn="l">
+              <a:spcBef>
+                <a:spcPts val="0"/>
+              </a:spcBef>
+              <a:spcAft>
+                <a:spcPts val="0"/>
+              </a:spcAft>
+            </a:pPr>
+            <a:r>
+              <a:rPr sz="3600" b="1">
                 <a:solidFill>
-                  <a:srgbClr val="0B3D91"/>
+                  <a:srgbClr val="1A1A1A"/>
                 </a:solidFill>
+                <a:latin typeface="Calibri"/>
               </a:rPr>
-              <a:t>[1/8] Title</a:t>
+              <a:t>[executive_deck]</a:t>
+            </a:r>
+          </a:p>
+        </p:txBody>
+      </p:sp>
+      <p:sp>
+        <p:nvSpPr>
+          <p:cNvPr id="5" name="TextBox 4"/>
+          <p:cNvSpPr txBox="1"/>
+          <p:nvPr/>
+        </p:nvSpPr>
+        <p:spPr>
+          <a:xfrm>
+            <a:off x="1097280" y="3474720"/>
+            <a:ext cx="8229600" cy="731520"/>
+          </a:xfrm>
+          <a:prstGeom prst="rect">
+            <a:avLst/>
+          </a:prstGeom>
+          <a:noFill/>
+        </p:spPr>
+        <p:txBody>
+          <a:bodyPr wrap="square"/>
+          <a:lstStyle/>
+          <a:p>
+            <a:pPr algn="l">
+              <a:spcBef>
+                <a:spcPts val="0"/>
+              </a:spcBef>
+              <a:spcAft>
+                <a:spcPts val="0"/>
+              </a:spcAft>
+            </a:pPr>
+            <a:r>
+              <a:rPr sz="1800" b="0">
+                <a:solidFill>
+                  <a:srgbClr val="6B7280"/>
+                </a:solidFill>
+                <a:latin typeface="Calibri"/>
+              </a:rPr>
+              <a:t>Template — 8 slides</a:t>
             </a:r>
           </a:p>
         </p:txBody>
@@ -3148,14 +3281,143 @@
       <p:grpSpPr/>
       <p:sp>
         <p:nvSpPr>
-          <p:cNvPr id="2" name="TextBox 1"/>
+          <p:cNvPr id="2" name="Rectangle 1"/>
+          <p:cNvSpPr/>
+          <p:nvPr/>
+        </p:nvSpPr>
+        <p:spPr>
+          <a:xfrm>
+            <a:off x="0" y="0"/>
+            <a:ext cx="365760" cy="6858000"/>
+          </a:xfrm>
+          <a:prstGeom prst="rect">
+            <a:avLst/>
+          </a:prstGeom>
+          <a:solidFill>
+            <a:srgbClr val="002B5C"/>
+          </a:solidFill>
+          <a:ln>
+            <a:noFill/>
+          </a:ln>
+        </p:spPr>
+        <p:style>
+          <a:lnRef idx="1">
+            <a:schemeClr val="accent1"/>
+          </a:lnRef>
+          <a:fillRef idx="3">
+            <a:schemeClr val="accent1"/>
+          </a:fillRef>
+          <a:effectRef idx="2">
+            <a:schemeClr val="accent1"/>
+          </a:effectRef>
+          <a:fontRef idx="minor">
+            <a:schemeClr val="lt1"/>
+          </a:fontRef>
+        </p:style>
+        <p:txBody>
+          <a:bodyPr rtlCol="0" anchor="ctr"/>
+          <a:lstStyle/>
+          <a:p>
+            <a:pPr algn="ctr"/>
+          </a:p>
+        </p:txBody>
+      </p:sp>
+      <p:sp>
+        <p:nvSpPr>
+          <p:cNvPr id="3" name="Rectangle 2"/>
+          <p:cNvSpPr/>
+          <p:nvPr/>
+        </p:nvSpPr>
+        <p:spPr>
+          <a:xfrm>
+            <a:off x="365760" y="0"/>
+            <a:ext cx="11825935" cy="36576"/>
+          </a:xfrm>
+          <a:prstGeom prst="rect">
+            <a:avLst/>
+          </a:prstGeom>
+          <a:solidFill>
+            <a:srgbClr val="007EE5"/>
+          </a:solidFill>
+          <a:ln>
+            <a:noFill/>
+          </a:ln>
+        </p:spPr>
+        <p:style>
+          <a:lnRef idx="1">
+            <a:schemeClr val="accent1"/>
+          </a:lnRef>
+          <a:fillRef idx="3">
+            <a:schemeClr val="accent1"/>
+          </a:fillRef>
+          <a:effectRef idx="2">
+            <a:schemeClr val="accent1"/>
+          </a:effectRef>
+          <a:fontRef idx="minor">
+            <a:schemeClr val="lt1"/>
+          </a:fontRef>
+        </p:style>
+        <p:txBody>
+          <a:bodyPr rtlCol="0" anchor="ctr"/>
+          <a:lstStyle/>
+          <a:p>
+            <a:pPr algn="ctr"/>
+          </a:p>
+        </p:txBody>
+      </p:sp>
+      <p:sp>
+        <p:nvSpPr>
+          <p:cNvPr id="4" name="Rectangle 3"/>
+          <p:cNvSpPr/>
+          <p:nvPr/>
+        </p:nvSpPr>
+        <p:spPr>
+          <a:xfrm>
+            <a:off x="365760" y="36576"/>
+            <a:ext cx="11825935" cy="1005840"/>
+          </a:xfrm>
+          <a:prstGeom prst="rect">
+            <a:avLst/>
+          </a:prstGeom>
+          <a:solidFill>
+            <a:srgbClr val="F7F8FA"/>
+          </a:solidFill>
+          <a:ln>
+            <a:noFill/>
+          </a:ln>
+        </p:spPr>
+        <p:style>
+          <a:lnRef idx="1">
+            <a:schemeClr val="accent1"/>
+          </a:lnRef>
+          <a:fillRef idx="3">
+            <a:schemeClr val="accent1"/>
+          </a:fillRef>
+          <a:effectRef idx="2">
+            <a:schemeClr val="accent1"/>
+          </a:effectRef>
+          <a:fontRef idx="minor">
+            <a:schemeClr val="lt1"/>
+          </a:fontRef>
+        </p:style>
+        <p:txBody>
+          <a:bodyPr rtlCol="0" anchor="ctr"/>
+          <a:lstStyle/>
+          <a:p>
+            <a:pPr algn="ctr"/>
+          </a:p>
+        </p:txBody>
+      </p:sp>
+      <p:sp>
+        <p:nvSpPr>
+          <p:cNvPr id="5" name="TextBox 4"/>
           <p:cNvSpPr txBox="1"/>
           <p:nvPr/>
         </p:nvSpPr>
         <p:spPr>
           <a:xfrm>
-            <a:off x="457200" y="365760"/>
-            <a:ext cx="11247120" cy="822960"/>
+            <a:off x="822960" y="164592"/>
+            <a:ext cx="10515600" cy="731520"/>
           </a:xfrm>
           <a:prstGeom prst="rect">
             <a:avLst/>
@@ -3163,18 +3425,191 @@
           <a:noFill/>
         </p:spPr>
         <p:txBody>
-          <a:bodyPr wrap="none">
-            <a:spAutoFit/>
-          </a:bodyPr>
-          <a:lstStyle/>
-          <a:p>
-            <a:r>
-              <a:rPr sz="2400" b="1">
+          <a:bodyPr wrap="square"/>
+          <a:lstStyle/>
+          <a:p>
+            <a:pPr algn="l">
+              <a:spcBef>
+                <a:spcPts val="0"/>
+              </a:spcBef>
+              <a:spcAft>
+                <a:spcPts val="0"/>
+              </a:spcAft>
+            </a:pPr>
+            <a:r>
+              <a:rPr sz="2200" b="1">
                 <a:solidFill>
-                  <a:srgbClr val="0B3D91"/>
+                  <a:srgbClr val="002B5C"/>
                 </a:solidFill>
+                <a:latin typeface="Calibri"/>
               </a:rPr>
               <a:t>[2/8] Executive summary</a:t>
+            </a:r>
+          </a:p>
+        </p:txBody>
+      </p:sp>
+      <p:sp>
+        <p:nvSpPr>
+          <p:cNvPr id="6" name="Rectangle 5"/>
+          <p:cNvSpPr/>
+          <p:nvPr/>
+        </p:nvSpPr>
+        <p:spPr>
+          <a:xfrm>
+            <a:off x="822960" y="1042415"/>
+            <a:ext cx="10058400" cy="18288"/>
+          </a:xfrm>
+          <a:prstGeom prst="rect">
+            <a:avLst/>
+          </a:prstGeom>
+          <a:solidFill>
+            <a:srgbClr val="007EE5"/>
+          </a:solidFill>
+          <a:ln>
+            <a:noFill/>
+          </a:ln>
+        </p:spPr>
+        <p:style>
+          <a:lnRef idx="1">
+            <a:schemeClr val="accent1"/>
+          </a:lnRef>
+          <a:fillRef idx="3">
+            <a:schemeClr val="accent1"/>
+          </a:fillRef>
+          <a:effectRef idx="2">
+            <a:schemeClr val="accent1"/>
+          </a:effectRef>
+          <a:fontRef idx="minor">
+            <a:schemeClr val="lt1"/>
+          </a:fontRef>
+        </p:style>
+        <p:txBody>
+          <a:bodyPr rtlCol="0" anchor="ctr"/>
+          <a:lstStyle/>
+          <a:p>
+            <a:pPr algn="ctr"/>
+          </a:p>
+        </p:txBody>
+      </p:sp>
+      <p:sp>
+        <p:nvSpPr>
+          <p:cNvPr id="7" name="Rectangle 6"/>
+          <p:cNvSpPr/>
+          <p:nvPr/>
+        </p:nvSpPr>
+        <p:spPr>
+          <a:xfrm>
+            <a:off x="822960" y="6446520"/>
+            <a:ext cx="10515600" cy="9144"/>
+          </a:xfrm>
+          <a:prstGeom prst="rect">
+            <a:avLst/>
+          </a:prstGeom>
+          <a:solidFill>
+            <a:srgbClr val="6B7280"/>
+          </a:solidFill>
+          <a:ln>
+            <a:noFill/>
+          </a:ln>
+        </p:spPr>
+        <p:style>
+          <a:lnRef idx="1">
+            <a:schemeClr val="accent1"/>
+          </a:lnRef>
+          <a:fillRef idx="3">
+            <a:schemeClr val="accent1"/>
+          </a:fillRef>
+          <a:effectRef idx="2">
+            <a:schemeClr val="accent1"/>
+          </a:effectRef>
+          <a:fontRef idx="minor">
+            <a:schemeClr val="lt1"/>
+          </a:fontRef>
+        </p:style>
+        <p:txBody>
+          <a:bodyPr rtlCol="0" anchor="ctr"/>
+          <a:lstStyle/>
+          <a:p>
+            <a:pPr algn="ctr"/>
+          </a:p>
+        </p:txBody>
+      </p:sp>
+      <p:sp>
+        <p:nvSpPr>
+          <p:cNvPr id="8" name="TextBox 7"/>
+          <p:cNvSpPr txBox="1"/>
+          <p:nvPr/>
+        </p:nvSpPr>
+        <p:spPr>
+          <a:xfrm>
+            <a:off x="11155680" y="6492240"/>
+            <a:ext cx="731520" cy="274320"/>
+          </a:xfrm>
+          <a:prstGeom prst="rect">
+            <a:avLst/>
+          </a:prstGeom>
+          <a:noFill/>
+        </p:spPr>
+        <p:txBody>
+          <a:bodyPr wrap="square"/>
+          <a:lstStyle/>
+          <a:p>
+            <a:pPr algn="r">
+              <a:spcBef>
+                <a:spcPts val="0"/>
+              </a:spcBef>
+              <a:spcAft>
+                <a:spcPts val="0"/>
+              </a:spcAft>
+            </a:pPr>
+            <a:r>
+              <a:rPr sz="900" b="0">
+                <a:solidFill>
+                  <a:srgbClr val="6B7280"/>
+                </a:solidFill>
+                <a:latin typeface="Calibri"/>
+              </a:rPr>
+              <a:t>2/8</a:t>
+            </a:r>
+          </a:p>
+        </p:txBody>
+      </p:sp>
+      <p:sp>
+        <p:nvSpPr>
+          <p:cNvPr id="9" name="TextBox 8"/>
+          <p:cNvSpPr txBox="1"/>
+          <p:nvPr/>
+        </p:nvSpPr>
+        <p:spPr>
+          <a:xfrm>
+            <a:off x="822960" y="6492240"/>
+            <a:ext cx="2743200" cy="274320"/>
+          </a:xfrm>
+          <a:prstGeom prst="rect">
+            <a:avLst/>
+          </a:prstGeom>
+          <a:noFill/>
+        </p:spPr>
+        <p:txBody>
+          <a:bodyPr wrap="square"/>
+          <a:lstStyle/>
+          <a:p>
+            <a:pPr algn="l">
+              <a:spcBef>
+                <a:spcPts val="0"/>
+              </a:spcBef>
+              <a:spcAft>
+                <a:spcPts val="0"/>
+              </a:spcAft>
+            </a:pPr>
+            <a:r>
+              <a:rPr sz="800" b="0">
+                <a:solidFill>
+                  <a:srgbClr val="6B7280"/>
+                </a:solidFill>
+                <a:latin typeface="Calibri"/>
+              </a:rPr>
+              <a:t>CONFIDENTIEL</a:t>
             </a:r>
           </a:p>
         </p:txBody>
@@ -3199,14 +3634,143 @@
       <p:grpSpPr/>
       <p:sp>
         <p:nvSpPr>
-          <p:cNvPr id="2" name="TextBox 1"/>
+          <p:cNvPr id="2" name="Rectangle 1"/>
+          <p:cNvSpPr/>
+          <p:nvPr/>
+        </p:nvSpPr>
+        <p:spPr>
+          <a:xfrm>
+            <a:off x="0" y="0"/>
+            <a:ext cx="365760" cy="6858000"/>
+          </a:xfrm>
+          <a:prstGeom prst="rect">
+            <a:avLst/>
+          </a:prstGeom>
+          <a:solidFill>
+            <a:srgbClr val="002B5C"/>
+          </a:solidFill>
+          <a:ln>
+            <a:noFill/>
+          </a:ln>
+        </p:spPr>
+        <p:style>
+          <a:lnRef idx="1">
+            <a:schemeClr val="accent1"/>
+          </a:lnRef>
+          <a:fillRef idx="3">
+            <a:schemeClr val="accent1"/>
+          </a:fillRef>
+          <a:effectRef idx="2">
+            <a:schemeClr val="accent1"/>
+          </a:effectRef>
+          <a:fontRef idx="minor">
+            <a:schemeClr val="lt1"/>
+          </a:fontRef>
+        </p:style>
+        <p:txBody>
+          <a:bodyPr rtlCol="0" anchor="ctr"/>
+          <a:lstStyle/>
+          <a:p>
+            <a:pPr algn="ctr"/>
+          </a:p>
+        </p:txBody>
+      </p:sp>
+      <p:sp>
+        <p:nvSpPr>
+          <p:cNvPr id="3" name="Rectangle 2"/>
+          <p:cNvSpPr/>
+          <p:nvPr/>
+        </p:nvSpPr>
+        <p:spPr>
+          <a:xfrm>
+            <a:off x="365760" y="0"/>
+            <a:ext cx="11825935" cy="36576"/>
+          </a:xfrm>
+          <a:prstGeom prst="rect">
+            <a:avLst/>
+          </a:prstGeom>
+          <a:solidFill>
+            <a:srgbClr val="007EE5"/>
+          </a:solidFill>
+          <a:ln>
+            <a:noFill/>
+          </a:ln>
+        </p:spPr>
+        <p:style>
+          <a:lnRef idx="1">
+            <a:schemeClr val="accent1"/>
+          </a:lnRef>
+          <a:fillRef idx="3">
+            <a:schemeClr val="accent1"/>
+          </a:fillRef>
+          <a:effectRef idx="2">
+            <a:schemeClr val="accent1"/>
+          </a:effectRef>
+          <a:fontRef idx="minor">
+            <a:schemeClr val="lt1"/>
+          </a:fontRef>
+        </p:style>
+        <p:txBody>
+          <a:bodyPr rtlCol="0" anchor="ctr"/>
+          <a:lstStyle/>
+          <a:p>
+            <a:pPr algn="ctr"/>
+          </a:p>
+        </p:txBody>
+      </p:sp>
+      <p:sp>
+        <p:nvSpPr>
+          <p:cNvPr id="4" name="Rectangle 3"/>
+          <p:cNvSpPr/>
+          <p:nvPr/>
+        </p:nvSpPr>
+        <p:spPr>
+          <a:xfrm>
+            <a:off x="365760" y="36576"/>
+            <a:ext cx="11825935" cy="1005840"/>
+          </a:xfrm>
+          <a:prstGeom prst="rect">
+            <a:avLst/>
+          </a:prstGeom>
+          <a:solidFill>
+            <a:srgbClr val="F7F8FA"/>
+          </a:solidFill>
+          <a:ln>
+            <a:noFill/>
+          </a:ln>
+        </p:spPr>
+        <p:style>
+          <a:lnRef idx="1">
+            <a:schemeClr val="accent1"/>
+          </a:lnRef>
+          <a:fillRef idx="3">
+            <a:schemeClr val="accent1"/>
+          </a:fillRef>
+          <a:effectRef idx="2">
+            <a:schemeClr val="accent1"/>
+          </a:effectRef>
+          <a:fontRef idx="minor">
+            <a:schemeClr val="lt1"/>
+          </a:fontRef>
+        </p:style>
+        <p:txBody>
+          <a:bodyPr rtlCol="0" anchor="ctr"/>
+          <a:lstStyle/>
+          <a:p>
+            <a:pPr algn="ctr"/>
+          </a:p>
+        </p:txBody>
+      </p:sp>
+      <p:sp>
+        <p:nvSpPr>
+          <p:cNvPr id="5" name="TextBox 4"/>
           <p:cNvSpPr txBox="1"/>
           <p:nvPr/>
         </p:nvSpPr>
         <p:spPr>
           <a:xfrm>
-            <a:off x="457200" y="365760"/>
-            <a:ext cx="11247120" cy="822960"/>
+            <a:off x="822960" y="164592"/>
+            <a:ext cx="10515600" cy="731520"/>
           </a:xfrm>
           <a:prstGeom prst="rect">
             <a:avLst/>
@@ -3214,18 +3778,191 @@
           <a:noFill/>
         </p:spPr>
         <p:txBody>
-          <a:bodyPr wrap="none">
-            <a:spAutoFit/>
-          </a:bodyPr>
-          <a:lstStyle/>
-          <a:p>
-            <a:r>
-              <a:rPr sz="2400" b="1">
+          <a:bodyPr wrap="square"/>
+          <a:lstStyle/>
+          <a:p>
+            <a:pPr algn="l">
+              <a:spcBef>
+                <a:spcPts val="0"/>
+              </a:spcBef>
+              <a:spcAft>
+                <a:spcPts val="0"/>
+              </a:spcAft>
+            </a:pPr>
+            <a:r>
+              <a:rPr sz="2200" b="1">
                 <a:solidFill>
-                  <a:srgbClr val="0B3D91"/>
+                  <a:srgbClr val="002B5C"/>
                 </a:solidFill>
+                <a:latin typeface="Calibri"/>
               </a:rPr>
               <a:t>[3/8] Key finding 1</a:t>
+            </a:r>
+          </a:p>
+        </p:txBody>
+      </p:sp>
+      <p:sp>
+        <p:nvSpPr>
+          <p:cNvPr id="6" name="Rectangle 5"/>
+          <p:cNvSpPr/>
+          <p:nvPr/>
+        </p:nvSpPr>
+        <p:spPr>
+          <a:xfrm>
+            <a:off x="822960" y="1042415"/>
+            <a:ext cx="10058400" cy="18288"/>
+          </a:xfrm>
+          <a:prstGeom prst="rect">
+            <a:avLst/>
+          </a:prstGeom>
+          <a:solidFill>
+            <a:srgbClr val="007EE5"/>
+          </a:solidFill>
+          <a:ln>
+            <a:noFill/>
+          </a:ln>
+        </p:spPr>
+        <p:style>
+          <a:lnRef idx="1">
+            <a:schemeClr val="accent1"/>
+          </a:lnRef>
+          <a:fillRef idx="3">
+            <a:schemeClr val="accent1"/>
+          </a:fillRef>
+          <a:effectRef idx="2">
+            <a:schemeClr val="accent1"/>
+          </a:effectRef>
+          <a:fontRef idx="minor">
+            <a:schemeClr val="lt1"/>
+          </a:fontRef>
+        </p:style>
+        <p:txBody>
+          <a:bodyPr rtlCol="0" anchor="ctr"/>
+          <a:lstStyle/>
+          <a:p>
+            <a:pPr algn="ctr"/>
+          </a:p>
+        </p:txBody>
+      </p:sp>
+      <p:sp>
+        <p:nvSpPr>
+          <p:cNvPr id="7" name="Rectangle 6"/>
+          <p:cNvSpPr/>
+          <p:nvPr/>
+        </p:nvSpPr>
+        <p:spPr>
+          <a:xfrm>
+            <a:off x="822960" y="6446520"/>
+            <a:ext cx="10515600" cy="9144"/>
+          </a:xfrm>
+          <a:prstGeom prst="rect">
+            <a:avLst/>
+          </a:prstGeom>
+          <a:solidFill>
+            <a:srgbClr val="6B7280"/>
+          </a:solidFill>
+          <a:ln>
+            <a:noFill/>
+          </a:ln>
+        </p:spPr>
+        <p:style>
+          <a:lnRef idx="1">
+            <a:schemeClr val="accent1"/>
+          </a:lnRef>
+          <a:fillRef idx="3">
+            <a:schemeClr val="accent1"/>
+          </a:fillRef>
+          <a:effectRef idx="2">
+            <a:schemeClr val="accent1"/>
+          </a:effectRef>
+          <a:fontRef idx="minor">
+            <a:schemeClr val="lt1"/>
+          </a:fontRef>
+        </p:style>
+        <p:txBody>
+          <a:bodyPr rtlCol="0" anchor="ctr"/>
+          <a:lstStyle/>
+          <a:p>
+            <a:pPr algn="ctr"/>
+          </a:p>
+        </p:txBody>
+      </p:sp>
+      <p:sp>
+        <p:nvSpPr>
+          <p:cNvPr id="8" name="TextBox 7"/>
+          <p:cNvSpPr txBox="1"/>
+          <p:nvPr/>
+        </p:nvSpPr>
+        <p:spPr>
+          <a:xfrm>
+            <a:off x="11155680" y="6492240"/>
+            <a:ext cx="731520" cy="274320"/>
+          </a:xfrm>
+          <a:prstGeom prst="rect">
+            <a:avLst/>
+          </a:prstGeom>
+          <a:noFill/>
+        </p:spPr>
+        <p:txBody>
+          <a:bodyPr wrap="square"/>
+          <a:lstStyle/>
+          <a:p>
+            <a:pPr algn="r">
+              <a:spcBef>
+                <a:spcPts val="0"/>
+              </a:spcBef>
+              <a:spcAft>
+                <a:spcPts val="0"/>
+              </a:spcAft>
+            </a:pPr>
+            <a:r>
+              <a:rPr sz="900" b="0">
+                <a:solidFill>
+                  <a:srgbClr val="6B7280"/>
+                </a:solidFill>
+                <a:latin typeface="Calibri"/>
+              </a:rPr>
+              <a:t>3/8</a:t>
+            </a:r>
+          </a:p>
+        </p:txBody>
+      </p:sp>
+      <p:sp>
+        <p:nvSpPr>
+          <p:cNvPr id="9" name="TextBox 8"/>
+          <p:cNvSpPr txBox="1"/>
+          <p:nvPr/>
+        </p:nvSpPr>
+        <p:spPr>
+          <a:xfrm>
+            <a:off x="822960" y="6492240"/>
+            <a:ext cx="2743200" cy="274320"/>
+          </a:xfrm>
+          <a:prstGeom prst="rect">
+            <a:avLst/>
+          </a:prstGeom>
+          <a:noFill/>
+        </p:spPr>
+        <p:txBody>
+          <a:bodyPr wrap="square"/>
+          <a:lstStyle/>
+          <a:p>
+            <a:pPr algn="l">
+              <a:spcBef>
+                <a:spcPts val="0"/>
+              </a:spcBef>
+              <a:spcAft>
+                <a:spcPts val="0"/>
+              </a:spcAft>
+            </a:pPr>
+            <a:r>
+              <a:rPr sz="800" b="0">
+                <a:solidFill>
+                  <a:srgbClr val="6B7280"/>
+                </a:solidFill>
+                <a:latin typeface="Calibri"/>
+              </a:rPr>
+              <a:t>CONFIDENTIEL</a:t>
             </a:r>
           </a:p>
         </p:txBody>
@@ -3250,14 +3987,143 @@
       <p:grpSpPr/>
       <p:sp>
         <p:nvSpPr>
-          <p:cNvPr id="2" name="TextBox 1"/>
+          <p:cNvPr id="2" name="Rectangle 1"/>
+          <p:cNvSpPr/>
+          <p:nvPr/>
+        </p:nvSpPr>
+        <p:spPr>
+          <a:xfrm>
+            <a:off x="0" y="0"/>
+            <a:ext cx="365760" cy="6858000"/>
+          </a:xfrm>
+          <a:prstGeom prst="rect">
+            <a:avLst/>
+          </a:prstGeom>
+          <a:solidFill>
+            <a:srgbClr val="002B5C"/>
+          </a:solidFill>
+          <a:ln>
+            <a:noFill/>
+          </a:ln>
+        </p:spPr>
+        <p:style>
+          <a:lnRef idx="1">
+            <a:schemeClr val="accent1"/>
+          </a:lnRef>
+          <a:fillRef idx="3">
+            <a:schemeClr val="accent1"/>
+          </a:fillRef>
+          <a:effectRef idx="2">
+            <a:schemeClr val="accent1"/>
+          </a:effectRef>
+          <a:fontRef idx="minor">
+            <a:schemeClr val="lt1"/>
+          </a:fontRef>
+        </p:style>
+        <p:txBody>
+          <a:bodyPr rtlCol="0" anchor="ctr"/>
+          <a:lstStyle/>
+          <a:p>
+            <a:pPr algn="ctr"/>
+          </a:p>
+        </p:txBody>
+      </p:sp>
+      <p:sp>
+        <p:nvSpPr>
+          <p:cNvPr id="3" name="Rectangle 2"/>
+          <p:cNvSpPr/>
+          <p:nvPr/>
+        </p:nvSpPr>
+        <p:spPr>
+          <a:xfrm>
+            <a:off x="365760" y="0"/>
+            <a:ext cx="11825935" cy="36576"/>
+          </a:xfrm>
+          <a:prstGeom prst="rect">
+            <a:avLst/>
+          </a:prstGeom>
+          <a:solidFill>
+            <a:srgbClr val="007EE5"/>
+          </a:solidFill>
+          <a:ln>
+            <a:noFill/>
+          </a:ln>
+        </p:spPr>
+        <p:style>
+          <a:lnRef idx="1">
+            <a:schemeClr val="accent1"/>
+          </a:lnRef>
+          <a:fillRef idx="3">
+            <a:schemeClr val="accent1"/>
+          </a:fillRef>
+          <a:effectRef idx="2">
+            <a:schemeClr val="accent1"/>
+          </a:effectRef>
+          <a:fontRef idx="minor">
+            <a:schemeClr val="lt1"/>
+          </a:fontRef>
+        </p:style>
+        <p:txBody>
+          <a:bodyPr rtlCol="0" anchor="ctr"/>
+          <a:lstStyle/>
+          <a:p>
+            <a:pPr algn="ctr"/>
+          </a:p>
+        </p:txBody>
+      </p:sp>
+      <p:sp>
+        <p:nvSpPr>
+          <p:cNvPr id="4" name="Rectangle 3"/>
+          <p:cNvSpPr/>
+          <p:nvPr/>
+        </p:nvSpPr>
+        <p:spPr>
+          <a:xfrm>
+            <a:off x="365760" y="36576"/>
+            <a:ext cx="11825935" cy="1005840"/>
+          </a:xfrm>
+          <a:prstGeom prst="rect">
+            <a:avLst/>
+          </a:prstGeom>
+          <a:solidFill>
+            <a:srgbClr val="F7F8FA"/>
+          </a:solidFill>
+          <a:ln>
+            <a:noFill/>
+          </a:ln>
+        </p:spPr>
+        <p:style>
+          <a:lnRef idx="1">
+            <a:schemeClr val="accent1"/>
+          </a:lnRef>
+          <a:fillRef idx="3">
+            <a:schemeClr val="accent1"/>
+          </a:fillRef>
+          <a:effectRef idx="2">
+            <a:schemeClr val="accent1"/>
+          </a:effectRef>
+          <a:fontRef idx="minor">
+            <a:schemeClr val="lt1"/>
+          </a:fontRef>
+        </p:style>
+        <p:txBody>
+          <a:bodyPr rtlCol="0" anchor="ctr"/>
+          <a:lstStyle/>
+          <a:p>
+            <a:pPr algn="ctr"/>
+          </a:p>
+        </p:txBody>
+      </p:sp>
+      <p:sp>
+        <p:nvSpPr>
+          <p:cNvPr id="5" name="TextBox 4"/>
           <p:cNvSpPr txBox="1"/>
           <p:nvPr/>
         </p:nvSpPr>
         <p:spPr>
           <a:xfrm>
-            <a:off x="457200" y="365760"/>
-            <a:ext cx="11247120" cy="822960"/>
+            <a:off x="822960" y="164592"/>
+            <a:ext cx="10515600" cy="731520"/>
           </a:xfrm>
           <a:prstGeom prst="rect">
             <a:avLst/>
@@ -3265,18 +4131,191 @@
           <a:noFill/>
         </p:spPr>
         <p:txBody>
-          <a:bodyPr wrap="none">
-            <a:spAutoFit/>
-          </a:bodyPr>
-          <a:lstStyle/>
-          <a:p>
-            <a:r>
-              <a:rPr sz="2400" b="1">
+          <a:bodyPr wrap="square"/>
+          <a:lstStyle/>
+          <a:p>
+            <a:pPr algn="l">
+              <a:spcBef>
+                <a:spcPts val="0"/>
+              </a:spcBef>
+              <a:spcAft>
+                <a:spcPts val="0"/>
+              </a:spcAft>
+            </a:pPr>
+            <a:r>
+              <a:rPr sz="2200" b="1">
                 <a:solidFill>
-                  <a:srgbClr val="0B3D91"/>
+                  <a:srgbClr val="002B5C"/>
                 </a:solidFill>
+                <a:latin typeface="Calibri"/>
               </a:rPr>
               <a:t>[4/8] Key finding 2</a:t>
+            </a:r>
+          </a:p>
+        </p:txBody>
+      </p:sp>
+      <p:sp>
+        <p:nvSpPr>
+          <p:cNvPr id="6" name="Rectangle 5"/>
+          <p:cNvSpPr/>
+          <p:nvPr/>
+        </p:nvSpPr>
+        <p:spPr>
+          <a:xfrm>
+            <a:off x="822960" y="1042415"/>
+            <a:ext cx="10058400" cy="18288"/>
+          </a:xfrm>
+          <a:prstGeom prst="rect">
+            <a:avLst/>
+          </a:prstGeom>
+          <a:solidFill>
+            <a:srgbClr val="007EE5"/>
+          </a:solidFill>
+          <a:ln>
+            <a:noFill/>
+          </a:ln>
+        </p:spPr>
+        <p:style>
+          <a:lnRef idx="1">
+            <a:schemeClr val="accent1"/>
+          </a:lnRef>
+          <a:fillRef idx="3">
+            <a:schemeClr val="accent1"/>
+          </a:fillRef>
+          <a:effectRef idx="2">
+            <a:schemeClr val="accent1"/>
+          </a:effectRef>
+          <a:fontRef idx="minor">
+            <a:schemeClr val="lt1"/>
+          </a:fontRef>
+        </p:style>
+        <p:txBody>
+          <a:bodyPr rtlCol="0" anchor="ctr"/>
+          <a:lstStyle/>
+          <a:p>
+            <a:pPr algn="ctr"/>
+          </a:p>
+        </p:txBody>
+      </p:sp>
+      <p:sp>
+        <p:nvSpPr>
+          <p:cNvPr id="7" name="Rectangle 6"/>
+          <p:cNvSpPr/>
+          <p:nvPr/>
+        </p:nvSpPr>
+        <p:spPr>
+          <a:xfrm>
+            <a:off x="822960" y="6446520"/>
+            <a:ext cx="10515600" cy="9144"/>
+          </a:xfrm>
+          <a:prstGeom prst="rect">
+            <a:avLst/>
+          </a:prstGeom>
+          <a:solidFill>
+            <a:srgbClr val="6B7280"/>
+          </a:solidFill>
+          <a:ln>
+            <a:noFill/>
+          </a:ln>
+        </p:spPr>
+        <p:style>
+          <a:lnRef idx="1">
+            <a:schemeClr val="accent1"/>
+          </a:lnRef>
+          <a:fillRef idx="3">
+            <a:schemeClr val="accent1"/>
+          </a:fillRef>
+          <a:effectRef idx="2">
+            <a:schemeClr val="accent1"/>
+          </a:effectRef>
+          <a:fontRef idx="minor">
+            <a:schemeClr val="lt1"/>
+          </a:fontRef>
+        </p:style>
+        <p:txBody>
+          <a:bodyPr rtlCol="0" anchor="ctr"/>
+          <a:lstStyle/>
+          <a:p>
+            <a:pPr algn="ctr"/>
+          </a:p>
+        </p:txBody>
+      </p:sp>
+      <p:sp>
+        <p:nvSpPr>
+          <p:cNvPr id="8" name="TextBox 7"/>
+          <p:cNvSpPr txBox="1"/>
+          <p:nvPr/>
+        </p:nvSpPr>
+        <p:spPr>
+          <a:xfrm>
+            <a:off x="11155680" y="6492240"/>
+            <a:ext cx="731520" cy="274320"/>
+          </a:xfrm>
+          <a:prstGeom prst="rect">
+            <a:avLst/>
+          </a:prstGeom>
+          <a:noFill/>
+        </p:spPr>
+        <p:txBody>
+          <a:bodyPr wrap="square"/>
+          <a:lstStyle/>
+          <a:p>
+            <a:pPr algn="r">
+              <a:spcBef>
+                <a:spcPts val="0"/>
+              </a:spcBef>
+              <a:spcAft>
+                <a:spcPts val="0"/>
+              </a:spcAft>
+            </a:pPr>
+            <a:r>
+              <a:rPr sz="900" b="0">
+                <a:solidFill>
+                  <a:srgbClr val="6B7280"/>
+                </a:solidFill>
+                <a:latin typeface="Calibri"/>
+              </a:rPr>
+              <a:t>4/8</a:t>
+            </a:r>
+          </a:p>
+        </p:txBody>
+      </p:sp>
+      <p:sp>
+        <p:nvSpPr>
+          <p:cNvPr id="9" name="TextBox 8"/>
+          <p:cNvSpPr txBox="1"/>
+          <p:nvPr/>
+        </p:nvSpPr>
+        <p:spPr>
+          <a:xfrm>
+            <a:off x="822960" y="6492240"/>
+            <a:ext cx="2743200" cy="274320"/>
+          </a:xfrm>
+          <a:prstGeom prst="rect">
+            <a:avLst/>
+          </a:prstGeom>
+          <a:noFill/>
+        </p:spPr>
+        <p:txBody>
+          <a:bodyPr wrap="square"/>
+          <a:lstStyle/>
+          <a:p>
+            <a:pPr algn="l">
+              <a:spcBef>
+                <a:spcPts val="0"/>
+              </a:spcBef>
+              <a:spcAft>
+                <a:spcPts val="0"/>
+              </a:spcAft>
+            </a:pPr>
+            <a:r>
+              <a:rPr sz="800" b="0">
+                <a:solidFill>
+                  <a:srgbClr val="6B7280"/>
+                </a:solidFill>
+                <a:latin typeface="Calibri"/>
+              </a:rPr>
+              <a:t>CONFIDENTIEL</a:t>
             </a:r>
           </a:p>
         </p:txBody>
@@ -3301,14 +4340,143 @@
       <p:grpSpPr/>
       <p:sp>
         <p:nvSpPr>
-          <p:cNvPr id="2" name="TextBox 1"/>
+          <p:cNvPr id="2" name="Rectangle 1"/>
+          <p:cNvSpPr/>
+          <p:nvPr/>
+        </p:nvSpPr>
+        <p:spPr>
+          <a:xfrm>
+            <a:off x="0" y="0"/>
+            <a:ext cx="365760" cy="6858000"/>
+          </a:xfrm>
+          <a:prstGeom prst="rect">
+            <a:avLst/>
+          </a:prstGeom>
+          <a:solidFill>
+            <a:srgbClr val="002B5C"/>
+          </a:solidFill>
+          <a:ln>
+            <a:noFill/>
+          </a:ln>
+        </p:spPr>
+        <p:style>
+          <a:lnRef idx="1">
+            <a:schemeClr val="accent1"/>
+          </a:lnRef>
+          <a:fillRef idx="3">
+            <a:schemeClr val="accent1"/>
+          </a:fillRef>
+          <a:effectRef idx="2">
+            <a:schemeClr val="accent1"/>
+          </a:effectRef>
+          <a:fontRef idx="minor">
+            <a:schemeClr val="lt1"/>
+          </a:fontRef>
+        </p:style>
+        <p:txBody>
+          <a:bodyPr rtlCol="0" anchor="ctr"/>
+          <a:lstStyle/>
+          <a:p>
+            <a:pPr algn="ctr"/>
+          </a:p>
+        </p:txBody>
+      </p:sp>
+      <p:sp>
+        <p:nvSpPr>
+          <p:cNvPr id="3" name="Rectangle 2"/>
+          <p:cNvSpPr/>
+          <p:nvPr/>
+        </p:nvSpPr>
+        <p:spPr>
+          <a:xfrm>
+            <a:off x="365760" y="0"/>
+            <a:ext cx="11825935" cy="36576"/>
+          </a:xfrm>
+          <a:prstGeom prst="rect">
+            <a:avLst/>
+          </a:prstGeom>
+          <a:solidFill>
+            <a:srgbClr val="007EE5"/>
+          </a:solidFill>
+          <a:ln>
+            <a:noFill/>
+          </a:ln>
+        </p:spPr>
+        <p:style>
+          <a:lnRef idx="1">
+            <a:schemeClr val="accent1"/>
+          </a:lnRef>
+          <a:fillRef idx="3">
+            <a:schemeClr val="accent1"/>
+          </a:fillRef>
+          <a:effectRef idx="2">
+            <a:schemeClr val="accent1"/>
+          </a:effectRef>
+          <a:fontRef idx="minor">
+            <a:schemeClr val="lt1"/>
+          </a:fontRef>
+        </p:style>
+        <p:txBody>
+          <a:bodyPr rtlCol="0" anchor="ctr"/>
+          <a:lstStyle/>
+          <a:p>
+            <a:pPr algn="ctr"/>
+          </a:p>
+        </p:txBody>
+      </p:sp>
+      <p:sp>
+        <p:nvSpPr>
+          <p:cNvPr id="4" name="Rectangle 3"/>
+          <p:cNvSpPr/>
+          <p:nvPr/>
+        </p:nvSpPr>
+        <p:spPr>
+          <a:xfrm>
+            <a:off x="365760" y="36576"/>
+            <a:ext cx="11825935" cy="1005840"/>
+          </a:xfrm>
+          <a:prstGeom prst="rect">
+            <a:avLst/>
+          </a:prstGeom>
+          <a:solidFill>
+            <a:srgbClr val="F7F8FA"/>
+          </a:solidFill>
+          <a:ln>
+            <a:noFill/>
+          </a:ln>
+        </p:spPr>
+        <p:style>
+          <a:lnRef idx="1">
+            <a:schemeClr val="accent1"/>
+          </a:lnRef>
+          <a:fillRef idx="3">
+            <a:schemeClr val="accent1"/>
+          </a:fillRef>
+          <a:effectRef idx="2">
+            <a:schemeClr val="accent1"/>
+          </a:effectRef>
+          <a:fontRef idx="minor">
+            <a:schemeClr val="lt1"/>
+          </a:fontRef>
+        </p:style>
+        <p:txBody>
+          <a:bodyPr rtlCol="0" anchor="ctr"/>
+          <a:lstStyle/>
+          <a:p>
+            <a:pPr algn="ctr"/>
+          </a:p>
+        </p:txBody>
+      </p:sp>
+      <p:sp>
+        <p:nvSpPr>
+          <p:cNvPr id="5" name="TextBox 4"/>
           <p:cNvSpPr txBox="1"/>
           <p:nvPr/>
         </p:nvSpPr>
         <p:spPr>
           <a:xfrm>
-            <a:off x="457200" y="365760"/>
-            <a:ext cx="11247120" cy="822960"/>
+            <a:off x="822960" y="164592"/>
+            <a:ext cx="10515600" cy="731520"/>
           </a:xfrm>
           <a:prstGeom prst="rect">
             <a:avLst/>
@@ -3316,18 +4484,191 @@
           <a:noFill/>
         </p:spPr>
         <p:txBody>
-          <a:bodyPr wrap="none">
-            <a:spAutoFit/>
-          </a:bodyPr>
-          <a:lstStyle/>
-          <a:p>
-            <a:r>
-              <a:rPr sz="2400" b="1">
+          <a:bodyPr wrap="square"/>
+          <a:lstStyle/>
+          <a:p>
+            <a:pPr algn="l">
+              <a:spcBef>
+                <a:spcPts val="0"/>
+              </a:spcBef>
+              <a:spcAft>
+                <a:spcPts val="0"/>
+              </a:spcAft>
+            </a:pPr>
+            <a:r>
+              <a:rPr sz="2200" b="1">
                 <a:solidFill>
-                  <a:srgbClr val="0B3D91"/>
+                  <a:srgbClr val="002B5C"/>
                 </a:solidFill>
+                <a:latin typeface="Calibri"/>
               </a:rPr>
               <a:t>[5/8] Key finding 3</a:t>
+            </a:r>
+          </a:p>
+        </p:txBody>
+      </p:sp>
+      <p:sp>
+        <p:nvSpPr>
+          <p:cNvPr id="6" name="Rectangle 5"/>
+          <p:cNvSpPr/>
+          <p:nvPr/>
+        </p:nvSpPr>
+        <p:spPr>
+          <a:xfrm>
+            <a:off x="822960" y="1042415"/>
+            <a:ext cx="10058400" cy="18288"/>
+          </a:xfrm>
+          <a:prstGeom prst="rect">
+            <a:avLst/>
+          </a:prstGeom>
+          <a:solidFill>
+            <a:srgbClr val="007EE5"/>
+          </a:solidFill>
+          <a:ln>
+            <a:noFill/>
+          </a:ln>
+        </p:spPr>
+        <p:style>
+          <a:lnRef idx="1">
+            <a:schemeClr val="accent1"/>
+          </a:lnRef>
+          <a:fillRef idx="3">
+            <a:schemeClr val="accent1"/>
+          </a:fillRef>
+          <a:effectRef idx="2">
+            <a:schemeClr val="accent1"/>
+          </a:effectRef>
+          <a:fontRef idx="minor">
+            <a:schemeClr val="lt1"/>
+          </a:fontRef>
+        </p:style>
+        <p:txBody>
+          <a:bodyPr rtlCol="0" anchor="ctr"/>
+          <a:lstStyle/>
+          <a:p>
+            <a:pPr algn="ctr"/>
+          </a:p>
+        </p:txBody>
+      </p:sp>
+      <p:sp>
+        <p:nvSpPr>
+          <p:cNvPr id="7" name="Rectangle 6"/>
+          <p:cNvSpPr/>
+          <p:nvPr/>
+        </p:nvSpPr>
+        <p:spPr>
+          <a:xfrm>
+            <a:off x="822960" y="6446520"/>
+            <a:ext cx="10515600" cy="9144"/>
+          </a:xfrm>
+          <a:prstGeom prst="rect">
+            <a:avLst/>
+          </a:prstGeom>
+          <a:solidFill>
+            <a:srgbClr val="6B7280"/>
+          </a:solidFill>
+          <a:ln>
+            <a:noFill/>
+          </a:ln>
+        </p:spPr>
+        <p:style>
+          <a:lnRef idx="1">
+            <a:schemeClr val="accent1"/>
+          </a:lnRef>
+          <a:fillRef idx="3">
+            <a:schemeClr val="accent1"/>
+          </a:fillRef>
+          <a:effectRef idx="2">
+            <a:schemeClr val="accent1"/>
+          </a:effectRef>
+          <a:fontRef idx="minor">
+            <a:schemeClr val="lt1"/>
+          </a:fontRef>
+        </p:style>
+        <p:txBody>
+          <a:bodyPr rtlCol="0" anchor="ctr"/>
+          <a:lstStyle/>
+          <a:p>
+            <a:pPr algn="ctr"/>
+          </a:p>
+        </p:txBody>
+      </p:sp>
+      <p:sp>
+        <p:nvSpPr>
+          <p:cNvPr id="8" name="TextBox 7"/>
+          <p:cNvSpPr txBox="1"/>
+          <p:nvPr/>
+        </p:nvSpPr>
+        <p:spPr>
+          <a:xfrm>
+            <a:off x="11155680" y="6492240"/>
+            <a:ext cx="731520" cy="274320"/>
+          </a:xfrm>
+          <a:prstGeom prst="rect">
+            <a:avLst/>
+          </a:prstGeom>
+          <a:noFill/>
+        </p:spPr>
+        <p:txBody>
+          <a:bodyPr wrap="square"/>
+          <a:lstStyle/>
+          <a:p>
+            <a:pPr algn="r">
+              <a:spcBef>
+                <a:spcPts val="0"/>
+              </a:spcBef>
+              <a:spcAft>
+                <a:spcPts val="0"/>
+              </a:spcAft>
+            </a:pPr>
+            <a:r>
+              <a:rPr sz="900" b="0">
+                <a:solidFill>
+                  <a:srgbClr val="6B7280"/>
+                </a:solidFill>
+                <a:latin typeface="Calibri"/>
+              </a:rPr>
+              <a:t>5/8</a:t>
+            </a:r>
+          </a:p>
+        </p:txBody>
+      </p:sp>
+      <p:sp>
+        <p:nvSpPr>
+          <p:cNvPr id="9" name="TextBox 8"/>
+          <p:cNvSpPr txBox="1"/>
+          <p:nvPr/>
+        </p:nvSpPr>
+        <p:spPr>
+          <a:xfrm>
+            <a:off x="822960" y="6492240"/>
+            <a:ext cx="2743200" cy="274320"/>
+          </a:xfrm>
+          <a:prstGeom prst="rect">
+            <a:avLst/>
+          </a:prstGeom>
+          <a:noFill/>
+        </p:spPr>
+        <p:txBody>
+          <a:bodyPr wrap="square"/>
+          <a:lstStyle/>
+          <a:p>
+            <a:pPr algn="l">
+              <a:spcBef>
+                <a:spcPts val="0"/>
+              </a:spcBef>
+              <a:spcAft>
+                <a:spcPts val="0"/>
+              </a:spcAft>
+            </a:pPr>
+            <a:r>
+              <a:rPr sz="800" b="0">
+                <a:solidFill>
+                  <a:srgbClr val="6B7280"/>
+                </a:solidFill>
+                <a:latin typeface="Calibri"/>
+              </a:rPr>
+              <a:t>CONFIDENTIEL</a:t>
             </a:r>
           </a:p>
         </p:txBody>
@@ -3352,14 +4693,143 @@
       <p:grpSpPr/>
       <p:sp>
         <p:nvSpPr>
-          <p:cNvPr id="2" name="TextBox 1"/>
+          <p:cNvPr id="2" name="Rectangle 1"/>
+          <p:cNvSpPr/>
+          <p:nvPr/>
+        </p:nvSpPr>
+        <p:spPr>
+          <a:xfrm>
+            <a:off x="0" y="0"/>
+            <a:ext cx="365760" cy="6858000"/>
+          </a:xfrm>
+          <a:prstGeom prst="rect">
+            <a:avLst/>
+          </a:prstGeom>
+          <a:solidFill>
+            <a:srgbClr val="002B5C"/>
+          </a:solidFill>
+          <a:ln>
+            <a:noFill/>
+          </a:ln>
+        </p:spPr>
+        <p:style>
+          <a:lnRef idx="1">
+            <a:schemeClr val="accent1"/>
+          </a:lnRef>
+          <a:fillRef idx="3">
+            <a:schemeClr val="accent1"/>
+          </a:fillRef>
+          <a:effectRef idx="2">
+            <a:schemeClr val="accent1"/>
+          </a:effectRef>
+          <a:fontRef idx="minor">
+            <a:schemeClr val="lt1"/>
+          </a:fontRef>
+        </p:style>
+        <p:txBody>
+          <a:bodyPr rtlCol="0" anchor="ctr"/>
+          <a:lstStyle/>
+          <a:p>
+            <a:pPr algn="ctr"/>
+          </a:p>
+        </p:txBody>
+      </p:sp>
+      <p:sp>
+        <p:nvSpPr>
+          <p:cNvPr id="3" name="Rectangle 2"/>
+          <p:cNvSpPr/>
+          <p:nvPr/>
+        </p:nvSpPr>
+        <p:spPr>
+          <a:xfrm>
+            <a:off x="365760" y="0"/>
+            <a:ext cx="11825935" cy="36576"/>
+          </a:xfrm>
+          <a:prstGeom prst="rect">
+            <a:avLst/>
+          </a:prstGeom>
+          <a:solidFill>
+            <a:srgbClr val="007EE5"/>
+          </a:solidFill>
+          <a:ln>
+            <a:noFill/>
+          </a:ln>
+        </p:spPr>
+        <p:style>
+          <a:lnRef idx="1">
+            <a:schemeClr val="accent1"/>
+          </a:lnRef>
+          <a:fillRef idx="3">
+            <a:schemeClr val="accent1"/>
+          </a:fillRef>
+          <a:effectRef idx="2">
+            <a:schemeClr val="accent1"/>
+          </a:effectRef>
+          <a:fontRef idx="minor">
+            <a:schemeClr val="lt1"/>
+          </a:fontRef>
+        </p:style>
+        <p:txBody>
+          <a:bodyPr rtlCol="0" anchor="ctr"/>
+          <a:lstStyle/>
+          <a:p>
+            <a:pPr algn="ctr"/>
+          </a:p>
+        </p:txBody>
+      </p:sp>
+      <p:sp>
+        <p:nvSpPr>
+          <p:cNvPr id="4" name="Rectangle 3"/>
+          <p:cNvSpPr/>
+          <p:nvPr/>
+        </p:nvSpPr>
+        <p:spPr>
+          <a:xfrm>
+            <a:off x="365760" y="36576"/>
+            <a:ext cx="11825935" cy="1005840"/>
+          </a:xfrm>
+          <a:prstGeom prst="rect">
+            <a:avLst/>
+          </a:prstGeom>
+          <a:solidFill>
+            <a:srgbClr val="F7F8FA"/>
+          </a:solidFill>
+          <a:ln>
+            <a:noFill/>
+          </a:ln>
+        </p:spPr>
+        <p:style>
+          <a:lnRef idx="1">
+            <a:schemeClr val="accent1"/>
+          </a:lnRef>
+          <a:fillRef idx="3">
+            <a:schemeClr val="accent1"/>
+          </a:fillRef>
+          <a:effectRef idx="2">
+            <a:schemeClr val="accent1"/>
+          </a:effectRef>
+          <a:fontRef idx="minor">
+            <a:schemeClr val="lt1"/>
+          </a:fontRef>
+        </p:style>
+        <p:txBody>
+          <a:bodyPr rtlCol="0" anchor="ctr"/>
+          <a:lstStyle/>
+          <a:p>
+            <a:pPr algn="ctr"/>
+          </a:p>
+        </p:txBody>
+      </p:sp>
+      <p:sp>
+        <p:nvSpPr>
+          <p:cNvPr id="5" name="TextBox 4"/>
           <p:cNvSpPr txBox="1"/>
           <p:nvPr/>
         </p:nvSpPr>
         <p:spPr>
           <a:xfrm>
-            <a:off x="457200" y="365760"/>
-            <a:ext cx="11247120" cy="822960"/>
+            <a:off x="822960" y="164592"/>
+            <a:ext cx="10515600" cy="731520"/>
           </a:xfrm>
           <a:prstGeom prst="rect">
             <a:avLst/>
@@ -3367,18 +4837,191 @@
           <a:noFill/>
         </p:spPr>
         <p:txBody>
-          <a:bodyPr wrap="none">
-            <a:spAutoFit/>
-          </a:bodyPr>
-          <a:lstStyle/>
-          <a:p>
-            <a:r>
-              <a:rPr sz="2400" b="1">
+          <a:bodyPr wrap="square"/>
+          <a:lstStyle/>
+          <a:p>
+            <a:pPr algn="l">
+              <a:spcBef>
+                <a:spcPts val="0"/>
+              </a:spcBef>
+              <a:spcAft>
+                <a:spcPts val="0"/>
+              </a:spcAft>
+            </a:pPr>
+            <a:r>
+              <a:rPr sz="2200" b="1">
                 <a:solidFill>
-                  <a:srgbClr val="0B3D91"/>
+                  <a:srgbClr val="002B5C"/>
                 </a:solidFill>
+                <a:latin typeface="Calibri"/>
               </a:rPr>
               <a:t>[6/8] Recommandations</a:t>
+            </a:r>
+          </a:p>
+        </p:txBody>
+      </p:sp>
+      <p:sp>
+        <p:nvSpPr>
+          <p:cNvPr id="6" name="Rectangle 5"/>
+          <p:cNvSpPr/>
+          <p:nvPr/>
+        </p:nvSpPr>
+        <p:spPr>
+          <a:xfrm>
+            <a:off x="822960" y="1042415"/>
+            <a:ext cx="10058400" cy="18288"/>
+          </a:xfrm>
+          <a:prstGeom prst="rect">
+            <a:avLst/>
+          </a:prstGeom>
+          <a:solidFill>
+            <a:srgbClr val="007EE5"/>
+          </a:solidFill>
+          <a:ln>
+            <a:noFill/>
+          </a:ln>
+        </p:spPr>
+        <p:style>
+          <a:lnRef idx="1">
+            <a:schemeClr val="accent1"/>
+          </a:lnRef>
+          <a:fillRef idx="3">
+            <a:schemeClr val="accent1"/>
+          </a:fillRef>
+          <a:effectRef idx="2">
+            <a:schemeClr val="accent1"/>
+          </a:effectRef>
+          <a:fontRef idx="minor">
+            <a:schemeClr val="lt1"/>
+          </a:fontRef>
+        </p:style>
+        <p:txBody>
+          <a:bodyPr rtlCol="0" anchor="ctr"/>
+          <a:lstStyle/>
+          <a:p>
+            <a:pPr algn="ctr"/>
+          </a:p>
+        </p:txBody>
+      </p:sp>
+      <p:sp>
+        <p:nvSpPr>
+          <p:cNvPr id="7" name="Rectangle 6"/>
+          <p:cNvSpPr/>
+          <p:nvPr/>
+        </p:nvSpPr>
+        <p:spPr>
+          <a:xfrm>
+            <a:off x="822960" y="6446520"/>
+            <a:ext cx="10515600" cy="9144"/>
+          </a:xfrm>
+          <a:prstGeom prst="rect">
+            <a:avLst/>
+          </a:prstGeom>
+          <a:solidFill>
+            <a:srgbClr val="6B7280"/>
+          </a:solidFill>
+          <a:ln>
+            <a:noFill/>
+          </a:ln>
+        </p:spPr>
+        <p:style>
+          <a:lnRef idx="1">
+            <a:schemeClr val="accent1"/>
+          </a:lnRef>
+          <a:fillRef idx="3">
+            <a:schemeClr val="accent1"/>
+          </a:fillRef>
+          <a:effectRef idx="2">
+            <a:schemeClr val="accent1"/>
+          </a:effectRef>
+          <a:fontRef idx="minor">
+            <a:schemeClr val="lt1"/>
+          </a:fontRef>
+        </p:style>
+        <p:txBody>
+          <a:bodyPr rtlCol="0" anchor="ctr"/>
+          <a:lstStyle/>
+          <a:p>
+            <a:pPr algn="ctr"/>
+          </a:p>
+        </p:txBody>
+      </p:sp>
+      <p:sp>
+        <p:nvSpPr>
+          <p:cNvPr id="8" name="TextBox 7"/>
+          <p:cNvSpPr txBox="1"/>
+          <p:nvPr/>
+        </p:nvSpPr>
+        <p:spPr>
+          <a:xfrm>
+            <a:off x="11155680" y="6492240"/>
+            <a:ext cx="731520" cy="274320"/>
+          </a:xfrm>
+          <a:prstGeom prst="rect">
+            <a:avLst/>
+          </a:prstGeom>
+          <a:noFill/>
+        </p:spPr>
+        <p:txBody>
+          <a:bodyPr wrap="square"/>
+          <a:lstStyle/>
+          <a:p>
+            <a:pPr algn="r">
+              <a:spcBef>
+                <a:spcPts val="0"/>
+              </a:spcBef>
+              <a:spcAft>
+                <a:spcPts val="0"/>
+              </a:spcAft>
+            </a:pPr>
+            <a:r>
+              <a:rPr sz="900" b="0">
+                <a:solidFill>
+                  <a:srgbClr val="6B7280"/>
+                </a:solidFill>
+                <a:latin typeface="Calibri"/>
+              </a:rPr>
+              <a:t>6/8</a:t>
+            </a:r>
+          </a:p>
+        </p:txBody>
+      </p:sp>
+      <p:sp>
+        <p:nvSpPr>
+          <p:cNvPr id="9" name="TextBox 8"/>
+          <p:cNvSpPr txBox="1"/>
+          <p:nvPr/>
+        </p:nvSpPr>
+        <p:spPr>
+          <a:xfrm>
+            <a:off x="822960" y="6492240"/>
+            <a:ext cx="2743200" cy="274320"/>
+          </a:xfrm>
+          <a:prstGeom prst="rect">
+            <a:avLst/>
+          </a:prstGeom>
+          <a:noFill/>
+        </p:spPr>
+        <p:txBody>
+          <a:bodyPr wrap="square"/>
+          <a:lstStyle/>
+          <a:p>
+            <a:pPr algn="l">
+              <a:spcBef>
+                <a:spcPts val="0"/>
+              </a:spcBef>
+              <a:spcAft>
+                <a:spcPts val="0"/>
+              </a:spcAft>
+            </a:pPr>
+            <a:r>
+              <a:rPr sz="800" b="0">
+                <a:solidFill>
+                  <a:srgbClr val="6B7280"/>
+                </a:solidFill>
+                <a:latin typeface="Calibri"/>
+              </a:rPr>
+              <a:t>CONFIDENTIEL</a:t>
             </a:r>
           </a:p>
         </p:txBody>
@@ -3403,14 +5046,143 @@
       <p:grpSpPr/>
       <p:sp>
         <p:nvSpPr>
-          <p:cNvPr id="2" name="TextBox 1"/>
+          <p:cNvPr id="2" name="Rectangle 1"/>
+          <p:cNvSpPr/>
+          <p:nvPr/>
+        </p:nvSpPr>
+        <p:spPr>
+          <a:xfrm>
+            <a:off x="0" y="0"/>
+            <a:ext cx="365760" cy="6858000"/>
+          </a:xfrm>
+          <a:prstGeom prst="rect">
+            <a:avLst/>
+          </a:prstGeom>
+          <a:solidFill>
+            <a:srgbClr val="002B5C"/>
+          </a:solidFill>
+          <a:ln>
+            <a:noFill/>
+          </a:ln>
+        </p:spPr>
+        <p:style>
+          <a:lnRef idx="1">
+            <a:schemeClr val="accent1"/>
+          </a:lnRef>
+          <a:fillRef idx="3">
+            <a:schemeClr val="accent1"/>
+          </a:fillRef>
+          <a:effectRef idx="2">
+            <a:schemeClr val="accent1"/>
+          </a:effectRef>
+          <a:fontRef idx="minor">
+            <a:schemeClr val="lt1"/>
+          </a:fontRef>
+        </p:style>
+        <p:txBody>
+          <a:bodyPr rtlCol="0" anchor="ctr"/>
+          <a:lstStyle/>
+          <a:p>
+            <a:pPr algn="ctr"/>
+          </a:p>
+        </p:txBody>
+      </p:sp>
+      <p:sp>
+        <p:nvSpPr>
+          <p:cNvPr id="3" name="Rectangle 2"/>
+          <p:cNvSpPr/>
+          <p:nvPr/>
+        </p:nvSpPr>
+        <p:spPr>
+          <a:xfrm>
+            <a:off x="365760" y="0"/>
+            <a:ext cx="11825935" cy="36576"/>
+          </a:xfrm>
+          <a:prstGeom prst="rect">
+            <a:avLst/>
+          </a:prstGeom>
+          <a:solidFill>
+            <a:srgbClr val="007EE5"/>
+          </a:solidFill>
+          <a:ln>
+            <a:noFill/>
+          </a:ln>
+        </p:spPr>
+        <p:style>
+          <a:lnRef idx="1">
+            <a:schemeClr val="accent1"/>
+          </a:lnRef>
+          <a:fillRef idx="3">
+            <a:schemeClr val="accent1"/>
+          </a:fillRef>
+          <a:effectRef idx="2">
+            <a:schemeClr val="accent1"/>
+          </a:effectRef>
+          <a:fontRef idx="minor">
+            <a:schemeClr val="lt1"/>
+          </a:fontRef>
+        </p:style>
+        <p:txBody>
+          <a:bodyPr rtlCol="0" anchor="ctr"/>
+          <a:lstStyle/>
+          <a:p>
+            <a:pPr algn="ctr"/>
+          </a:p>
+        </p:txBody>
+      </p:sp>
+      <p:sp>
+        <p:nvSpPr>
+          <p:cNvPr id="4" name="Rectangle 3"/>
+          <p:cNvSpPr/>
+          <p:nvPr/>
+        </p:nvSpPr>
+        <p:spPr>
+          <a:xfrm>
+            <a:off x="365760" y="36576"/>
+            <a:ext cx="11825935" cy="1005840"/>
+          </a:xfrm>
+          <a:prstGeom prst="rect">
+            <a:avLst/>
+          </a:prstGeom>
+          <a:solidFill>
+            <a:srgbClr val="F7F8FA"/>
+          </a:solidFill>
+          <a:ln>
+            <a:noFill/>
+          </a:ln>
+        </p:spPr>
+        <p:style>
+          <a:lnRef idx="1">
+            <a:schemeClr val="accent1"/>
+          </a:lnRef>
+          <a:fillRef idx="3">
+            <a:schemeClr val="accent1"/>
+          </a:fillRef>
+          <a:effectRef idx="2">
+            <a:schemeClr val="accent1"/>
+          </a:effectRef>
+          <a:fontRef idx="minor">
+            <a:schemeClr val="lt1"/>
+          </a:fontRef>
+        </p:style>
+        <p:txBody>
+          <a:bodyPr rtlCol="0" anchor="ctr"/>
+          <a:lstStyle/>
+          <a:p>
+            <a:pPr algn="ctr"/>
+          </a:p>
+        </p:txBody>
+      </p:sp>
+      <p:sp>
+        <p:nvSpPr>
+          <p:cNvPr id="5" name="TextBox 4"/>
           <p:cNvSpPr txBox="1"/>
           <p:nvPr/>
         </p:nvSpPr>
         <p:spPr>
           <a:xfrm>
-            <a:off x="457200" y="365760"/>
-            <a:ext cx="11247120" cy="822960"/>
+            <a:off x="822960" y="164592"/>
+            <a:ext cx="10515600" cy="731520"/>
           </a:xfrm>
           <a:prstGeom prst="rect">
             <a:avLst/>
@@ -3418,18 +5190,191 @@
           <a:noFill/>
         </p:spPr>
         <p:txBody>
-          <a:bodyPr wrap="none">
-            <a:spAutoFit/>
-          </a:bodyPr>
-          <a:lstStyle/>
-          <a:p>
-            <a:r>
-              <a:rPr sz="2400" b="1">
+          <a:bodyPr wrap="square"/>
+          <a:lstStyle/>
+          <a:p>
+            <a:pPr algn="l">
+              <a:spcBef>
+                <a:spcPts val="0"/>
+              </a:spcBef>
+              <a:spcAft>
+                <a:spcPts val="0"/>
+              </a:spcAft>
+            </a:pPr>
+            <a:r>
+              <a:rPr sz="2200" b="1">
                 <a:solidFill>
-                  <a:srgbClr val="0B3D91"/>
+                  <a:srgbClr val="002B5C"/>
                 </a:solidFill>
+                <a:latin typeface="Calibri"/>
               </a:rPr>
               <a:t>[7/8] Next steps</a:t>
+            </a:r>
+          </a:p>
+        </p:txBody>
+      </p:sp>
+      <p:sp>
+        <p:nvSpPr>
+          <p:cNvPr id="6" name="Rectangle 5"/>
+          <p:cNvSpPr/>
+          <p:nvPr/>
+        </p:nvSpPr>
+        <p:spPr>
+          <a:xfrm>
+            <a:off x="822960" y="1042415"/>
+            <a:ext cx="10058400" cy="18288"/>
+          </a:xfrm>
+          <a:prstGeom prst="rect">
+            <a:avLst/>
+          </a:prstGeom>
+          <a:solidFill>
+            <a:srgbClr val="007EE5"/>
+          </a:solidFill>
+          <a:ln>
+            <a:noFill/>
+          </a:ln>
+        </p:spPr>
+        <p:style>
+          <a:lnRef idx="1">
+            <a:schemeClr val="accent1"/>
+          </a:lnRef>
+          <a:fillRef idx="3">
+            <a:schemeClr val="accent1"/>
+          </a:fillRef>
+          <a:effectRef idx="2">
+            <a:schemeClr val="accent1"/>
+          </a:effectRef>
+          <a:fontRef idx="minor">
+            <a:schemeClr val="lt1"/>
+          </a:fontRef>
+        </p:style>
+        <p:txBody>
+          <a:bodyPr rtlCol="0" anchor="ctr"/>
+          <a:lstStyle/>
+          <a:p>
+            <a:pPr algn="ctr"/>
+          </a:p>
+        </p:txBody>
+      </p:sp>
+      <p:sp>
+        <p:nvSpPr>
+          <p:cNvPr id="7" name="Rectangle 6"/>
+          <p:cNvSpPr/>
+          <p:nvPr/>
+        </p:nvSpPr>
+        <p:spPr>
+          <a:xfrm>
+            <a:off x="822960" y="6446520"/>
+            <a:ext cx="10515600" cy="9144"/>
+          </a:xfrm>
+          <a:prstGeom prst="rect">
+            <a:avLst/>
+          </a:prstGeom>
+          <a:solidFill>
+            <a:srgbClr val="6B7280"/>
+          </a:solidFill>
+          <a:ln>
+            <a:noFill/>
+          </a:ln>
+        </p:spPr>
+        <p:style>
+          <a:lnRef idx="1">
+            <a:schemeClr val="accent1"/>
+          </a:lnRef>
+          <a:fillRef idx="3">
+            <a:schemeClr val="accent1"/>
+          </a:fillRef>
+          <a:effectRef idx="2">
+            <a:schemeClr val="accent1"/>
+          </a:effectRef>
+          <a:fontRef idx="minor">
+            <a:schemeClr val="lt1"/>
+          </a:fontRef>
+        </p:style>
+        <p:txBody>
+          <a:bodyPr rtlCol="0" anchor="ctr"/>
+          <a:lstStyle/>
+          <a:p>
+            <a:pPr algn="ctr"/>
+          </a:p>
+        </p:txBody>
+      </p:sp>
+      <p:sp>
+        <p:nvSpPr>
+          <p:cNvPr id="8" name="TextBox 7"/>
+          <p:cNvSpPr txBox="1"/>
+          <p:nvPr/>
+        </p:nvSpPr>
+        <p:spPr>
+          <a:xfrm>
+            <a:off x="11155680" y="6492240"/>
+            <a:ext cx="731520" cy="274320"/>
+          </a:xfrm>
+          <a:prstGeom prst="rect">
+            <a:avLst/>
+          </a:prstGeom>
+          <a:noFill/>
+        </p:spPr>
+        <p:txBody>
+          <a:bodyPr wrap="square"/>
+          <a:lstStyle/>
+          <a:p>
+            <a:pPr algn="r">
+              <a:spcBef>
+                <a:spcPts val="0"/>
+              </a:spcBef>
+              <a:spcAft>
+                <a:spcPts val="0"/>
+              </a:spcAft>
+            </a:pPr>
+            <a:r>
+              <a:rPr sz="900" b="0">
+                <a:solidFill>
+                  <a:srgbClr val="6B7280"/>
+                </a:solidFill>
+                <a:latin typeface="Calibri"/>
+              </a:rPr>
+              <a:t>7/8</a:t>
+            </a:r>
+          </a:p>
+        </p:txBody>
+      </p:sp>
+      <p:sp>
+        <p:nvSpPr>
+          <p:cNvPr id="9" name="TextBox 8"/>
+          <p:cNvSpPr txBox="1"/>
+          <p:nvPr/>
+        </p:nvSpPr>
+        <p:spPr>
+          <a:xfrm>
+            <a:off x="822960" y="6492240"/>
+            <a:ext cx="2743200" cy="274320"/>
+          </a:xfrm>
+          <a:prstGeom prst="rect">
+            <a:avLst/>
+          </a:prstGeom>
+          <a:noFill/>
+        </p:spPr>
+        <p:txBody>
+          <a:bodyPr wrap="square"/>
+          <a:lstStyle/>
+          <a:p>
+            <a:pPr algn="l">
+              <a:spcBef>
+                <a:spcPts val="0"/>
+              </a:spcBef>
+              <a:spcAft>
+                <a:spcPts val="0"/>
+              </a:spcAft>
+            </a:pPr>
+            <a:r>
+              <a:rPr sz="800" b="0">
+                <a:solidFill>
+                  <a:srgbClr val="6B7280"/>
+                </a:solidFill>
+                <a:latin typeface="Calibri"/>
+              </a:rPr>
+              <a:t>CONFIDENTIEL</a:t>
             </a:r>
           </a:p>
         </p:txBody>
@@ -3454,14 +5399,143 @@
       <p:grpSpPr/>
       <p:sp>
         <p:nvSpPr>
-          <p:cNvPr id="2" name="TextBox 1"/>
+          <p:cNvPr id="2" name="Rectangle 1"/>
+          <p:cNvSpPr/>
+          <p:nvPr/>
+        </p:nvSpPr>
+        <p:spPr>
+          <a:xfrm>
+            <a:off x="0" y="0"/>
+            <a:ext cx="365760" cy="6858000"/>
+          </a:xfrm>
+          <a:prstGeom prst="rect">
+            <a:avLst/>
+          </a:prstGeom>
+          <a:solidFill>
+            <a:srgbClr val="002B5C"/>
+          </a:solidFill>
+          <a:ln>
+            <a:noFill/>
+          </a:ln>
+        </p:spPr>
+        <p:style>
+          <a:lnRef idx="1">
+            <a:schemeClr val="accent1"/>
+          </a:lnRef>
+          <a:fillRef idx="3">
+            <a:schemeClr val="accent1"/>
+          </a:fillRef>
+          <a:effectRef idx="2">
+            <a:schemeClr val="accent1"/>
+          </a:effectRef>
+          <a:fontRef idx="minor">
+            <a:schemeClr val="lt1"/>
+          </a:fontRef>
+        </p:style>
+        <p:txBody>
+          <a:bodyPr rtlCol="0" anchor="ctr"/>
+          <a:lstStyle/>
+          <a:p>
+            <a:pPr algn="ctr"/>
+          </a:p>
+        </p:txBody>
+      </p:sp>
+      <p:sp>
+        <p:nvSpPr>
+          <p:cNvPr id="3" name="Rectangle 2"/>
+          <p:cNvSpPr/>
+          <p:nvPr/>
+        </p:nvSpPr>
+        <p:spPr>
+          <a:xfrm>
+            <a:off x="365760" y="0"/>
+            <a:ext cx="11825935" cy="36576"/>
+          </a:xfrm>
+          <a:prstGeom prst="rect">
+            <a:avLst/>
+          </a:prstGeom>
+          <a:solidFill>
+            <a:srgbClr val="007EE5"/>
+          </a:solidFill>
+          <a:ln>
+            <a:noFill/>
+          </a:ln>
+        </p:spPr>
+        <p:style>
+          <a:lnRef idx="1">
+            <a:schemeClr val="accent1"/>
+          </a:lnRef>
+          <a:fillRef idx="3">
+            <a:schemeClr val="accent1"/>
+          </a:fillRef>
+          <a:effectRef idx="2">
+            <a:schemeClr val="accent1"/>
+          </a:effectRef>
+          <a:fontRef idx="minor">
+            <a:schemeClr val="lt1"/>
+          </a:fontRef>
+        </p:style>
+        <p:txBody>
+          <a:bodyPr rtlCol="0" anchor="ctr"/>
+          <a:lstStyle/>
+          <a:p>
+            <a:pPr algn="ctr"/>
+          </a:p>
+        </p:txBody>
+      </p:sp>
+      <p:sp>
+        <p:nvSpPr>
+          <p:cNvPr id="4" name="Rectangle 3"/>
+          <p:cNvSpPr/>
+          <p:nvPr/>
+        </p:nvSpPr>
+        <p:spPr>
+          <a:xfrm>
+            <a:off x="365760" y="36576"/>
+            <a:ext cx="11825935" cy="1005840"/>
+          </a:xfrm>
+          <a:prstGeom prst="rect">
+            <a:avLst/>
+          </a:prstGeom>
+          <a:solidFill>
+            <a:srgbClr val="F7F8FA"/>
+          </a:solidFill>
+          <a:ln>
+            <a:noFill/>
+          </a:ln>
+        </p:spPr>
+        <p:style>
+          <a:lnRef idx="1">
+            <a:schemeClr val="accent1"/>
+          </a:lnRef>
+          <a:fillRef idx="3">
+            <a:schemeClr val="accent1"/>
+          </a:fillRef>
+          <a:effectRef idx="2">
+            <a:schemeClr val="accent1"/>
+          </a:effectRef>
+          <a:fontRef idx="minor">
+            <a:schemeClr val="lt1"/>
+          </a:fontRef>
+        </p:style>
+        <p:txBody>
+          <a:bodyPr rtlCol="0" anchor="ctr"/>
+          <a:lstStyle/>
+          <a:p>
+            <a:pPr algn="ctr"/>
+          </a:p>
+        </p:txBody>
+      </p:sp>
+      <p:sp>
+        <p:nvSpPr>
+          <p:cNvPr id="5" name="TextBox 4"/>
           <p:cNvSpPr txBox="1"/>
           <p:nvPr/>
         </p:nvSpPr>
         <p:spPr>
           <a:xfrm>
-            <a:off x="457200" y="365760"/>
-            <a:ext cx="11247120" cy="822960"/>
+            <a:off x="822960" y="164592"/>
+            <a:ext cx="10515600" cy="731520"/>
           </a:xfrm>
           <a:prstGeom prst="rect">
             <a:avLst/>
@@ -3469,18 +5543,191 @@
           <a:noFill/>
         </p:spPr>
         <p:txBody>
-          <a:bodyPr wrap="none">
-            <a:spAutoFit/>
-          </a:bodyPr>
-          <a:lstStyle/>
-          <a:p>
-            <a:r>
-              <a:rPr sz="2400" b="1">
+          <a:bodyPr wrap="square"/>
+          <a:lstStyle/>
+          <a:p>
+            <a:pPr algn="l">
+              <a:spcBef>
+                <a:spcPts val="0"/>
+              </a:spcBef>
+              <a:spcAft>
+                <a:spcPts val="0"/>
+              </a:spcAft>
+            </a:pPr>
+            <a:r>
+              <a:rPr sz="2200" b="1">
                 <a:solidFill>
-                  <a:srgbClr val="0B3D91"/>
+                  <a:srgbClr val="002B5C"/>
                 </a:solidFill>
+                <a:latin typeface="Calibri"/>
               </a:rPr>
               <a:t>[8/8] Annexes</a:t>
+            </a:r>
+          </a:p>
+        </p:txBody>
+      </p:sp>
+      <p:sp>
+        <p:nvSpPr>
+          <p:cNvPr id="6" name="Rectangle 5"/>
+          <p:cNvSpPr/>
+          <p:nvPr/>
+        </p:nvSpPr>
+        <p:spPr>
+          <a:xfrm>
+            <a:off x="822960" y="1042415"/>
+            <a:ext cx="10058400" cy="18288"/>
+          </a:xfrm>
+          <a:prstGeom prst="rect">
+            <a:avLst/>
+          </a:prstGeom>
+          <a:solidFill>
+            <a:srgbClr val="007EE5"/>
+          </a:solidFill>
+          <a:ln>
+            <a:noFill/>
+          </a:ln>
+        </p:spPr>
+        <p:style>
+          <a:lnRef idx="1">
+            <a:schemeClr val="accent1"/>
+          </a:lnRef>
+          <a:fillRef idx="3">
+            <a:schemeClr val="accent1"/>
+          </a:fillRef>
+          <a:effectRef idx="2">
+            <a:schemeClr val="accent1"/>
+          </a:effectRef>
+          <a:fontRef idx="minor">
+            <a:schemeClr val="lt1"/>
+          </a:fontRef>
+        </p:style>
+        <p:txBody>
+          <a:bodyPr rtlCol="0" anchor="ctr"/>
+          <a:lstStyle/>
+          <a:p>
+            <a:pPr algn="ctr"/>
+          </a:p>
+        </p:txBody>
+      </p:sp>
+      <p:sp>
+        <p:nvSpPr>
+          <p:cNvPr id="7" name="Rectangle 6"/>
+          <p:cNvSpPr/>
+          <p:nvPr/>
+        </p:nvSpPr>
+        <p:spPr>
+          <a:xfrm>
+            <a:off x="822960" y="6446520"/>
+            <a:ext cx="10515600" cy="9144"/>
+          </a:xfrm>
+          <a:prstGeom prst="rect">
+            <a:avLst/>
+          </a:prstGeom>
+          <a:solidFill>
+            <a:srgbClr val="6B7280"/>
+          </a:solidFill>
+          <a:ln>
+            <a:noFill/>
+          </a:ln>
+        </p:spPr>
+        <p:style>
+          <a:lnRef idx="1">
+            <a:schemeClr val="accent1"/>
+          </a:lnRef>
+          <a:fillRef idx="3">
+            <a:schemeClr val="accent1"/>
+          </a:fillRef>
+          <a:effectRef idx="2">
+            <a:schemeClr val="accent1"/>
+          </a:effectRef>
+          <a:fontRef idx="minor">
+            <a:schemeClr val="lt1"/>
+          </a:fontRef>
+        </p:style>
+        <p:txBody>
+          <a:bodyPr rtlCol="0" anchor="ctr"/>
+          <a:lstStyle/>
+          <a:p>
+            <a:pPr algn="ctr"/>
+          </a:p>
+        </p:txBody>
+      </p:sp>
+      <p:sp>
+        <p:nvSpPr>
+          <p:cNvPr id="8" name="TextBox 7"/>
+          <p:cNvSpPr txBox="1"/>
+          <p:nvPr/>
+        </p:nvSpPr>
+        <p:spPr>
+          <a:xfrm>
+            <a:off x="11155680" y="6492240"/>
+            <a:ext cx="731520" cy="274320"/>
+          </a:xfrm>
+          <a:prstGeom prst="rect">
+            <a:avLst/>
+          </a:prstGeom>
+          <a:noFill/>
+        </p:spPr>
+        <p:txBody>
+          <a:bodyPr wrap="square"/>
+          <a:lstStyle/>
+          <a:p>
+            <a:pPr algn="r">
+              <a:spcBef>
+                <a:spcPts val="0"/>
+              </a:spcBef>
+              <a:spcAft>
+                <a:spcPts val="0"/>
+              </a:spcAft>
+            </a:pPr>
+            <a:r>
+              <a:rPr sz="900" b="0">
+                <a:solidFill>
+                  <a:srgbClr val="6B7280"/>
+                </a:solidFill>
+                <a:latin typeface="Calibri"/>
+              </a:rPr>
+              <a:t>8/8</a:t>
+            </a:r>
+          </a:p>
+        </p:txBody>
+      </p:sp>
+      <p:sp>
+        <p:nvSpPr>
+          <p:cNvPr id="9" name="TextBox 8"/>
+          <p:cNvSpPr txBox="1"/>
+          <p:nvPr/>
+        </p:nvSpPr>
+        <p:spPr>
+          <a:xfrm>
+            <a:off x="822960" y="6492240"/>
+            <a:ext cx="2743200" cy="274320"/>
+          </a:xfrm>
+          <a:prstGeom prst="rect">
+            <a:avLst/>
+          </a:prstGeom>
+          <a:noFill/>
+        </p:spPr>
+        <p:txBody>
+          <a:bodyPr wrap="square"/>
+          <a:lstStyle/>
+          <a:p>
+            <a:pPr algn="l">
+              <a:spcBef>
+                <a:spcPts val="0"/>
+              </a:spcBef>
+              <a:spcAft>
+                <a:spcPts val="0"/>
+              </a:spcAft>
+            </a:pPr>
+            <a:r>
+              <a:rPr sz="800" b="0">
+                <a:solidFill>
+                  <a:srgbClr val="6B7280"/>
+                </a:solidFill>
+                <a:latin typeface="Calibri"/>
+              </a:rPr>
+              <a:t>CONFIDENTIEL</a:t>
             </a:r>
           </a:p>
         </p:txBody>
